--- a/doc/mtp_with_consistency_method_v3.pptx
+++ b/doc/mtp_with_consistency_method_v3.pptx
@@ -11785,8 +11785,8 @@
           </a:fontRef>
         </p:style>
       </p:cxnSp>
-      <mc:AlternateContent xmlns:mc="http://schemas.openxmlformats.org/markup-compatibility/2006">
-        <mc:Choice xmlns:a14="http://schemas.microsoft.com/office/drawing/2010/main" Requires="a14">
+      <mc:AlternateContent xmlns:mc="http://schemas.openxmlformats.org/markup-compatibility/2006" xmlns:a14="http://schemas.microsoft.com/office/drawing/2010/main">
+        <mc:Choice Requires="a14">
           <p:sp>
             <p:nvSpPr>
               <p:cNvPr id="23" name="文字方塊 22">
@@ -12509,7 +12509,7 @@
             </p:txBody>
           </p:sp>
         </mc:Choice>
-        <mc:Fallback>
+        <mc:Fallback xmlns="">
           <p:sp>
             <p:nvSpPr>
               <p:cNvPr id="23" name="文字方塊 22">
@@ -14910,7 +14910,16 @@
                               </a:solidFill>
                               <a:latin typeface="Cambria Math" panose="02040503050406030204" pitchFamily="18" charset="0"/>
                             </a:rPr>
-                            <m:t>=1</m:t>
+                            <m:t>=</m:t>
+                          </m:r>
+                          <m:r>
+                            <a:rPr lang="en-US" altLang="zh-TW" sz="1600" i="1">
+                              <a:solidFill>
+                                <a:schemeClr val="tx1"/>
+                              </a:solidFill>
+                              <a:latin typeface="Cambria Math" panose="02040503050406030204" pitchFamily="18" charset="0"/>
+                            </a:rPr>
+                            <m:t>1</m:t>
                           </m:r>
                         </m:sub>
                         <m:sup>
@@ -14957,7 +14966,16 @@
                                   </a:solidFill>
                                   <a:latin typeface="Cambria Math" panose="02040503050406030204" pitchFamily="18" charset="0"/>
                                 </a:rPr>
-                                <m:t>=1</m:t>
+                                <m:t>=</m:t>
+                              </m:r>
+                              <m:r>
+                                <a:rPr lang="en-US" altLang="zh-TW" sz="1600" i="1">
+                                  <a:solidFill>
+                                    <a:schemeClr val="tx1"/>
+                                  </a:solidFill>
+                                  <a:latin typeface="Cambria Math" panose="02040503050406030204" pitchFamily="18" charset="0"/>
+                                </a:rPr>
+                                <m:t>1</m:t>
                               </m:r>
                             </m:sub>
                             <m:sup>
@@ -15737,8 +15755,8 @@
           <a:chExt cx="0" cy="0"/>
         </a:xfrm>
       </p:grpSpPr>
-      <mc:AlternateContent xmlns:mc="http://schemas.openxmlformats.org/markup-compatibility/2006">
-        <mc:Choice xmlns:a14="http://schemas.microsoft.com/office/drawing/2010/main" Requires="a14">
+      <mc:AlternateContent xmlns:mc="http://schemas.openxmlformats.org/markup-compatibility/2006" xmlns:a14="http://schemas.microsoft.com/office/drawing/2010/main">
+        <mc:Choice Requires="a14">
           <p:sp>
             <p:nvSpPr>
               <p:cNvPr id="87" name="文字方塊 86">
@@ -15853,7 +15871,7 @@
             </p:txBody>
           </p:sp>
         </mc:Choice>
-        <mc:Fallback>
+        <mc:Fallback xmlns="">
           <p:sp>
             <p:nvSpPr>
               <p:cNvPr id="87" name="文字方塊 86">
@@ -24772,16 +24790,12 @@
               <a:t>或 </a:t>
             </a:r>
             <a:r>
-              <a:rPr lang="en-US" altLang="zh-TW" sz="1600">
+              <a:rPr lang="en-US" altLang="zh-TW" sz="1600" dirty="0">
                 <a:latin typeface="標楷體" panose="03000509000000000000" pitchFamily="65" charset="-120"/>
                 <a:ea typeface="標楷體" panose="03000509000000000000" pitchFamily="65" charset="-120"/>
               </a:rPr>
               <a:t>EOS</a:t>
             </a:r>
-            <a:endParaRPr lang="en-US" altLang="zh-TW" sz="1600" dirty="0">
-              <a:latin typeface="標楷體" panose="03000509000000000000" pitchFamily="65" charset="-120"/>
-              <a:ea typeface="標楷體" panose="03000509000000000000" pitchFamily="65" charset="-120"/>
-            </a:endParaRPr>
           </a:p>
         </p:txBody>
       </p:sp>
@@ -25345,7 +25359,7 @@
           <p:nvPr>
             <p:extLst>
               <p:ext uri="{D42A27DB-BD31-4B8C-83A1-F6EECF244321}">
-                <p14:modId xmlns:p14="http://schemas.microsoft.com/office/powerpoint/2010/main" val="3699775200"/>
+                <p14:modId xmlns:p14="http://schemas.microsoft.com/office/powerpoint/2010/main" val="4142697864"/>
               </p:ext>
             </p:extLst>
           </p:nvPr>
@@ -25630,16 +25644,47 @@
                     <a:p>
                       <a:pPr algn="ctr"/>
                       <a:r>
-                        <a:rPr lang="en-US" altLang="zh-TW" sz="1600" dirty="0">
-                          <a:latin typeface="標楷體" panose="03000509000000000000" pitchFamily="65" charset="-120"/>
-                          <a:ea typeface="標楷體" panose="03000509000000000000" pitchFamily="65" charset="-120"/>
-                        </a:rPr>
-                        <a:t>consistency mainly improves distant draft prediction.</a:t>
-                      </a:r>
-                      <a:endParaRPr lang="zh-TW" altLang="en-US" sz="1600" dirty="0">
-                        <a:latin typeface="標楷體" panose="03000509000000000000" pitchFamily="65" charset="-120"/>
-                        <a:ea typeface="標楷體" panose="03000509000000000000" pitchFamily="65" charset="-120"/>
-                      </a:endParaRPr>
+                        <a:rPr lang="en-US" altLang="zh-TW" sz="1400" dirty="0" err="1">
+                          <a:latin typeface="標楷體" panose="03000509000000000000" pitchFamily="65" charset="-120"/>
+                          <a:ea typeface="標楷體" panose="03000509000000000000" pitchFamily="65" charset="-120"/>
+                        </a:rPr>
+                        <a:t>WikiText</a:t>
+                      </a:r>
+                      <a:r>
+                        <a:rPr lang="en-US" altLang="zh-TW" sz="1400" dirty="0">
+                          <a:latin typeface="標楷體" panose="03000509000000000000" pitchFamily="65" charset="-120"/>
+                          <a:ea typeface="標楷體" panose="03000509000000000000" pitchFamily="65" charset="-120"/>
+                        </a:rPr>
+                        <a:t> </a:t>
+                      </a:r>
+                      <a:r>
+                        <a:rPr lang="zh-TW" altLang="en-US" sz="1400" dirty="0">
+                          <a:latin typeface="標楷體" panose="03000509000000000000" pitchFamily="65" charset="-120"/>
+                          <a:ea typeface="標楷體" panose="03000509000000000000" pitchFamily="65" charset="-120"/>
+                        </a:rPr>
+                        <a:t>與 </a:t>
+                      </a:r>
+                      <a:r>
+                        <a:rPr lang="en-US" altLang="zh-TW" sz="1400" dirty="0" err="1">
+                          <a:latin typeface="標楷體" panose="03000509000000000000" pitchFamily="65" charset="-120"/>
+                          <a:ea typeface="標楷體" panose="03000509000000000000" pitchFamily="65" charset="-120"/>
+                        </a:rPr>
+                        <a:t>OpenWebText</a:t>
+                      </a:r>
+                      <a:r>
+                        <a:rPr lang="en-US" altLang="zh-TW" sz="1400" dirty="0">
+                          <a:latin typeface="標楷體" panose="03000509000000000000" pitchFamily="65" charset="-120"/>
+                          <a:ea typeface="標楷體" panose="03000509000000000000" pitchFamily="65" charset="-120"/>
+                        </a:rPr>
+                        <a:t> </a:t>
+                      </a:r>
+                      <a:r>
+                        <a:rPr lang="zh-TW" altLang="en-US" sz="1400" dirty="0">
+                          <a:latin typeface="標楷體" panose="03000509000000000000" pitchFamily="65" charset="-120"/>
+                          <a:ea typeface="標楷體" panose="03000509000000000000" pitchFamily="65" charset="-120"/>
+                        </a:rPr>
+                        <a:t>均屬於涵蓋多主題的一般英文文本，因此可能呈現相似的表現趨勢。</a:t>
+                      </a:r>
                     </a:p>
                   </a:txBody>
                   <a:tcPr anchor="ctr"/>
@@ -25743,13 +25788,34 @@
                     <a:p>
                       <a:pPr algn="ctr"/>
                       <a:r>
-                        <a:rPr lang="en-US" altLang="zh-TW" sz="1600" dirty="0">
-                          <a:latin typeface="標楷體" panose="03000509000000000000" pitchFamily="65" charset="-120"/>
-                          <a:ea typeface="標楷體" panose="03000509000000000000" pitchFamily="65" charset="-120"/>
-                        </a:rPr>
-                        <a:t>regular syntax leads to gains across all heads.</a:t>
-                      </a:r>
-                      <a:endParaRPr lang="zh-TW" altLang="en-US" sz="1600" dirty="0">
+                        <a:rPr lang="zh-TW" altLang="en-US" sz="1400" dirty="0">
+                          <a:latin typeface="標楷體" panose="03000509000000000000" pitchFamily="65" charset="-120"/>
+                          <a:ea typeface="標楷體" panose="03000509000000000000" pitchFamily="65" charset="-120"/>
+                        </a:rPr>
+                        <a:t>較正式且規則的句子結構，可能有助於所有 </a:t>
+                      </a:r>
+                      <a:r>
+                        <a:rPr lang="en-US" altLang="zh-TW" sz="1400" dirty="0">
+                          <a:latin typeface="標楷體" panose="03000509000000000000" pitchFamily="65" charset="-120"/>
+                          <a:ea typeface="標楷體" panose="03000509000000000000" pitchFamily="65" charset="-120"/>
+                        </a:rPr>
+                        <a:t>prediction heads </a:t>
+                      </a:r>
+                      <a:r>
+                        <a:rPr lang="zh-TW" altLang="en-US" sz="1400" dirty="0">
+                          <a:latin typeface="標楷體" panose="03000509000000000000" pitchFamily="65" charset="-120"/>
+                          <a:ea typeface="標楷體" panose="03000509000000000000" pitchFamily="65" charset="-120"/>
+                        </a:rPr>
+                        <a:t>都獲得一致的</a:t>
+                      </a:r>
+                      <a:r>
+                        <a:rPr lang="zh-TW" altLang="en-US" sz="1400">
+                          <a:latin typeface="標楷體" panose="03000509000000000000" pitchFamily="65" charset="-120"/>
+                          <a:ea typeface="標楷體" panose="03000509000000000000" pitchFamily="65" charset="-120"/>
+                        </a:rPr>
+                        <a:t>改善。</a:t>
+                      </a:r>
+                      <a:endParaRPr lang="zh-TW" altLang="en-US" sz="1400" dirty="0">
                         <a:latin typeface="標楷體" panose="03000509000000000000" pitchFamily="65" charset="-120"/>
                         <a:ea typeface="標楷體" panose="03000509000000000000" pitchFamily="65" charset="-120"/>
                       </a:endParaRPr>
@@ -25876,12 +25942,30 @@
                         <a:defRPr/>
                       </a:pPr>
                       <a:r>
-                        <a:rPr lang="en-US" altLang="zh-TW" sz="1600" dirty="0">
-                          <a:latin typeface="標楷體" panose="03000509000000000000" pitchFamily="65" charset="-120"/>
-                          <a:ea typeface="標楷體" panose="03000509000000000000" pitchFamily="65" charset="-120"/>
-                        </a:rPr>
-                        <a:t>strong context dependence produces the largest Head 1 gain.</a:t>
-                      </a:r>
+                        <a:rPr lang="zh-TW" altLang="en-US" sz="1400" dirty="0">
+                          <a:latin typeface="標楷體" panose="03000509000000000000" pitchFamily="65" charset="-120"/>
+                          <a:ea typeface="標楷體" panose="03000509000000000000" pitchFamily="65" charset="-120"/>
+                        </a:rPr>
+                        <a:t>對長距離上下文的高度依賴，可能是 </a:t>
+                      </a:r>
+                      <a:r>
+                        <a:rPr lang="en-US" altLang="zh-TW" sz="1400" dirty="0">
+                          <a:latin typeface="標楷體" panose="03000509000000000000" pitchFamily="65" charset="-120"/>
+                          <a:ea typeface="標楷體" panose="03000509000000000000" pitchFamily="65" charset="-120"/>
+                        </a:rPr>
+                        <a:t>Head 1 </a:t>
+                      </a:r>
+                      <a:r>
+                        <a:rPr lang="zh-TW" altLang="en-US" sz="1400" dirty="0">
+                          <a:latin typeface="標楷體" panose="03000509000000000000" pitchFamily="65" charset="-120"/>
+                          <a:ea typeface="標楷體" panose="03000509000000000000" pitchFamily="65" charset="-120"/>
+                        </a:rPr>
+                        <a:t>改善幅度較大的原因。</a:t>
+                      </a:r>
+                      <a:endParaRPr lang="en-US" altLang="zh-TW" sz="1400" dirty="0">
+                        <a:latin typeface="標楷體" panose="03000509000000000000" pitchFamily="65" charset="-120"/>
+                        <a:ea typeface="標楷體" panose="03000509000000000000" pitchFamily="65" charset="-120"/>
+                      </a:endParaRPr>
                     </a:p>
                   </a:txBody>
                   <a:tcPr anchor="ctr"/>
@@ -25989,16 +26073,26 @@
                     <a:p>
                       <a:pPr algn="ctr"/>
                       <a:r>
-                        <a:rPr lang="en-US" altLang="zh-TW" sz="1600" dirty="0">
-                          <a:latin typeface="標楷體" panose="03000509000000000000" pitchFamily="65" charset="-120"/>
-                          <a:ea typeface="標楷體" panose="03000509000000000000" pitchFamily="65" charset="-120"/>
-                        </a:rPr>
-                        <a:t>domain-specific knowledge limits improvement.</a:t>
-                      </a:r>
-                      <a:endParaRPr lang="zh-TW" altLang="en-US" sz="1600" dirty="0">
-                        <a:latin typeface="標楷體" panose="03000509000000000000" pitchFamily="65" charset="-120"/>
-                        <a:ea typeface="標楷體" panose="03000509000000000000" pitchFamily="65" charset="-120"/>
-                      </a:endParaRPr>
+                        <a:rPr lang="zh-TW" altLang="en-US" sz="1400" dirty="0">
+                          <a:latin typeface="標楷體" panose="03000509000000000000" pitchFamily="65" charset="-120"/>
+                          <a:ea typeface="標楷體" panose="03000509000000000000" pitchFamily="65" charset="-120"/>
+                        </a:rPr>
+                        <a:t>專業詞彙與領域特定內容，可能限制各個 </a:t>
+                      </a:r>
+                      <a:r>
+                        <a:rPr lang="en-US" altLang="zh-TW" sz="1400" dirty="0">
+                          <a:latin typeface="標楷體" panose="03000509000000000000" pitchFamily="65" charset="-120"/>
+                          <a:ea typeface="標楷體" panose="03000509000000000000" pitchFamily="65" charset="-120"/>
+                        </a:rPr>
+                        <a:t>prediction heads </a:t>
+                      </a:r>
+                      <a:r>
+                        <a:rPr lang="zh-TW" altLang="en-US" sz="1400" dirty="0">
+                          <a:latin typeface="標楷體" panose="03000509000000000000" pitchFamily="65" charset="-120"/>
+                          <a:ea typeface="標楷體" panose="03000509000000000000" pitchFamily="65" charset="-120"/>
+                        </a:rPr>
+                        <a:t>的改善幅度。</a:t>
+                      </a:r>
                     </a:p>
                   </a:txBody>
                   <a:tcPr anchor="ctr"/>
@@ -26106,16 +26200,26 @@
                     <a:p>
                       <a:pPr algn="ctr"/>
                       <a:r>
-                        <a:rPr lang="en-US" altLang="zh-TW" sz="1600" dirty="0">
-                          <a:latin typeface="標楷體" panose="03000509000000000000" pitchFamily="65" charset="-120"/>
-                          <a:ea typeface="標楷體" panose="03000509000000000000" pitchFamily="65" charset="-120"/>
-                        </a:rPr>
-                        <a:t>structured biomedical writing provides stable gains across heads.</a:t>
-                      </a:r>
-                      <a:endParaRPr lang="zh-TW" altLang="en-US" sz="1600" dirty="0">
-                        <a:latin typeface="標楷體" panose="03000509000000000000" pitchFamily="65" charset="-120"/>
-                        <a:ea typeface="標楷體" panose="03000509000000000000" pitchFamily="65" charset="-120"/>
-                      </a:endParaRPr>
+                        <a:rPr lang="zh-TW" altLang="en-US" sz="1400" dirty="0">
+                          <a:latin typeface="標楷體" panose="03000509000000000000" pitchFamily="65" charset="-120"/>
+                          <a:ea typeface="標楷體" panose="03000509000000000000" pitchFamily="65" charset="-120"/>
+                        </a:rPr>
+                        <a:t>結構化且領域一致的寫作風格，可能有助於所有 </a:t>
+                      </a:r>
+                      <a:r>
+                        <a:rPr lang="en-US" altLang="zh-TW" sz="1400" dirty="0">
+                          <a:latin typeface="標楷體" panose="03000509000000000000" pitchFamily="65" charset="-120"/>
+                          <a:ea typeface="標楷體" panose="03000509000000000000" pitchFamily="65" charset="-120"/>
+                        </a:rPr>
+                        <a:t>heads </a:t>
+                      </a:r>
+                      <a:r>
+                        <a:rPr lang="zh-TW" altLang="en-US" sz="1400" dirty="0">
+                          <a:latin typeface="標楷體" panose="03000509000000000000" pitchFamily="65" charset="-120"/>
+                          <a:ea typeface="標楷體" panose="03000509000000000000" pitchFamily="65" charset="-120"/>
+                        </a:rPr>
+                        <a:t>獲得穩定改善。</a:t>
+                      </a:r>
                     </a:p>
                   </a:txBody>
                   <a:tcPr anchor="ctr"/>
@@ -26174,10 +26278,10 @@
       </p:sp>
       <p:sp>
         <p:nvSpPr>
-          <p:cNvPr id="12" name="文字方塊 11">
+          <p:cNvPr id="3" name="文字方塊 2">
             <a:extLst>
               <a:ext uri="{FF2B5EF4-FFF2-40B4-BE49-F238E27FC236}">
-                <a16:creationId xmlns:a16="http://schemas.microsoft.com/office/drawing/2014/main" id="{19B868C5-8A25-E4D9-789D-8AD1F545214D}"/>
+                <a16:creationId xmlns:a16="http://schemas.microsoft.com/office/drawing/2014/main" id="{6D22F5D0-96C1-8836-835E-58AD28DA25D9}"/>
               </a:ext>
             </a:extLst>
           </p:cNvPr>
@@ -26186,8 +26290,8 @@
         </p:nvSpPr>
         <p:spPr>
           <a:xfrm>
-            <a:off x="347469" y="5044009"/>
-            <a:ext cx="10580943" cy="1384995"/>
+            <a:off x="347470" y="5191099"/>
+            <a:ext cx="10891660" cy="1292662"/>
           </a:xfrm>
           <a:prstGeom prst="rect">
             <a:avLst/>
@@ -26195,7 +26299,7 @@
           <a:noFill/>
         </p:spPr>
         <p:txBody>
-          <a:bodyPr wrap="square" rtlCol="0">
+          <a:bodyPr wrap="square">
             <a:spAutoFit/>
           </a:bodyPr>
           <a:lstStyle/>
@@ -26215,178 +26319,285 @@
             </a:endParaRPr>
           </a:p>
           <a:p>
-            <a:pPr marL="285750" indent="-285750">
-              <a:buFont typeface="Arial" panose="020B0604020202020204" pitchFamily="34" charset="0"/>
-              <a:buChar char="•"/>
-            </a:pPr>
-            <a:r>
-              <a:rPr lang="en-US" altLang="zh-TW" sz="1600" dirty="0">
-                <a:latin typeface="標楷體" panose="03000509000000000000" pitchFamily="65" charset="-120"/>
-                <a:ea typeface="標楷體" panose="03000509000000000000" pitchFamily="65" charset="-120"/>
-              </a:rPr>
-              <a:t>SDC+LCM</a:t>
-            </a:r>
-            <a:r>
-              <a:rPr lang="zh-TW" altLang="en-US" sz="1600" dirty="0">
-                <a:latin typeface="標楷體" panose="03000509000000000000" pitchFamily="65" charset="-120"/>
-                <a:ea typeface="標楷體" panose="03000509000000000000" pitchFamily="65" charset="-120"/>
-              </a:rPr>
-              <a:t>能提升</a:t>
-            </a:r>
-            <a:r>
-              <a:rPr lang="en-US" altLang="zh-TW" sz="1600" dirty="0">
-                <a:latin typeface="標楷體" panose="03000509000000000000" pitchFamily="65" charset="-120"/>
-                <a:ea typeface="標楷體" panose="03000509000000000000" pitchFamily="65" charset="-120"/>
-              </a:rPr>
-              <a:t>Head 1(teacher)</a:t>
-            </a:r>
-            <a:r>
-              <a:rPr lang="zh-TW" altLang="en-US" sz="1600" dirty="0">
-                <a:latin typeface="標楷體" panose="03000509000000000000" pitchFamily="65" charset="-120"/>
-                <a:ea typeface="標楷體" panose="03000509000000000000" pitchFamily="65" charset="-120"/>
-              </a:rPr>
-              <a:t>在有結構性語句的表現</a:t>
-            </a:r>
-            <a:endParaRPr lang="en-US" altLang="zh-TW" sz="1600" dirty="0">
-              <a:latin typeface="標楷體" panose="03000509000000000000" pitchFamily="65" charset="-120"/>
-              <a:ea typeface="標楷體" panose="03000509000000000000" pitchFamily="65" charset="-120"/>
-            </a:endParaRPr>
-          </a:p>
-          <a:p>
-            <a:pPr marL="285750" indent="-285750">
-              <a:buFont typeface="Arial" panose="020B0604020202020204" pitchFamily="34" charset="0"/>
-              <a:buChar char="•"/>
-            </a:pPr>
-            <a:r>
-              <a:rPr lang="en-US" altLang="zh-TW" sz="1600" dirty="0" err="1">
-                <a:latin typeface="標楷體" panose="03000509000000000000" pitchFamily="65" charset="-120"/>
-                <a:ea typeface="標楷體" panose="03000509000000000000" pitchFamily="65" charset="-120"/>
-              </a:rPr>
-              <a:t>Wikitext</a:t>
-            </a:r>
-            <a:r>
-              <a:rPr lang="zh-TW" altLang="en-US" sz="1600" dirty="0">
-                <a:latin typeface="標楷體" panose="03000509000000000000" pitchFamily="65" charset="-120"/>
-                <a:ea typeface="標楷體" panose="03000509000000000000" pitchFamily="65" charset="-120"/>
-              </a:rPr>
-              <a:t>與</a:t>
-            </a:r>
-            <a:r>
-              <a:rPr lang="en-US" altLang="zh-TW" sz="1600" dirty="0" err="1">
-                <a:latin typeface="標楷體" panose="03000509000000000000" pitchFamily="65" charset="-120"/>
-                <a:ea typeface="標楷體" panose="03000509000000000000" pitchFamily="65" charset="-120"/>
-              </a:rPr>
-              <a:t>Openwebtext</a:t>
-            </a:r>
-            <a:r>
-              <a:rPr lang="zh-TW" altLang="en-US" sz="1600" dirty="0">
-                <a:latin typeface="標楷體" panose="03000509000000000000" pitchFamily="65" charset="-120"/>
-                <a:ea typeface="標楷體" panose="03000509000000000000" pitchFamily="65" charset="-120"/>
-              </a:rPr>
-              <a:t>類似，所以只在</a:t>
-            </a:r>
-            <a:r>
-              <a:rPr lang="en-US" altLang="zh-TW" sz="1600" dirty="0">
-                <a:latin typeface="標楷體" panose="03000509000000000000" pitchFamily="65" charset="-120"/>
-                <a:ea typeface="標楷體" panose="03000509000000000000" pitchFamily="65" charset="-120"/>
-              </a:rPr>
-              <a:t>Head 2~4</a:t>
-            </a:r>
-            <a:r>
-              <a:rPr lang="zh-TW" altLang="en-US" sz="1600" dirty="0">
-                <a:latin typeface="標楷體" panose="03000509000000000000" pitchFamily="65" charset="-120"/>
-                <a:ea typeface="標楷體" panose="03000509000000000000" pitchFamily="65" charset="-120"/>
-              </a:rPr>
-              <a:t>有提升</a:t>
-            </a:r>
-            <a:endParaRPr lang="en-US" altLang="zh-TW" sz="1600" dirty="0">
-              <a:latin typeface="標楷體" panose="03000509000000000000" pitchFamily="65" charset="-120"/>
-              <a:ea typeface="標楷體" panose="03000509000000000000" pitchFamily="65" charset="-120"/>
-            </a:endParaRPr>
-          </a:p>
-          <a:p>
-            <a:pPr marL="285750" indent="-285750">
-              <a:buFont typeface="Arial" panose="020B0604020202020204" pitchFamily="34" charset="0"/>
-              <a:buChar char="•"/>
-            </a:pPr>
-            <a:r>
-              <a:rPr lang="zh-TW" altLang="en-US" sz="1600" dirty="0">
-                <a:latin typeface="標楷體" panose="03000509000000000000" pitchFamily="65" charset="-120"/>
-                <a:ea typeface="標楷體" panose="03000509000000000000" pitchFamily="65" charset="-120"/>
-              </a:rPr>
-              <a:t>縮然有使用</a:t>
-            </a:r>
-            <a:r>
-              <a:rPr lang="en-US" altLang="zh-TW" sz="1600" dirty="0">
-                <a:latin typeface="標楷體" panose="03000509000000000000" pitchFamily="65" charset="-120"/>
-                <a:ea typeface="標楷體" panose="03000509000000000000" pitchFamily="65" charset="-120"/>
-              </a:rPr>
-              <a:t>SDC + LCM</a:t>
-            </a:r>
-            <a:r>
-              <a:rPr lang="zh-TW" altLang="en-US" sz="1600" dirty="0">
-                <a:latin typeface="標楷體" panose="03000509000000000000" pitchFamily="65" charset="-120"/>
-                <a:ea typeface="標楷體" panose="03000509000000000000" pitchFamily="65" charset="-120"/>
-              </a:rPr>
-              <a:t>約束</a:t>
-            </a:r>
-            <a:r>
-              <a:rPr lang="en-US" altLang="zh-TW" sz="1600" dirty="0">
-                <a:latin typeface="標楷體" panose="03000509000000000000" pitchFamily="65" charset="-120"/>
-                <a:ea typeface="標楷體" panose="03000509000000000000" pitchFamily="65" charset="-120"/>
-              </a:rPr>
-              <a:t>Head 2~4</a:t>
-            </a:r>
-            <a:r>
-              <a:rPr lang="zh-TW" altLang="en-US" sz="1600" dirty="0">
-                <a:latin typeface="標楷體" panose="03000509000000000000" pitchFamily="65" charset="-120"/>
-                <a:ea typeface="標楷體" panose="03000509000000000000" pitchFamily="65" charset="-120"/>
-              </a:rPr>
-              <a:t>，但實際上</a:t>
-            </a:r>
-            <a:r>
-              <a:rPr lang="en-US" altLang="zh-TW" sz="1600" dirty="0">
-                <a:latin typeface="標楷體" panose="03000509000000000000" pitchFamily="65" charset="-120"/>
-                <a:ea typeface="標楷體" panose="03000509000000000000" pitchFamily="65" charset="-120"/>
-              </a:rPr>
-              <a:t>Head 4</a:t>
-            </a:r>
-            <a:r>
-              <a:rPr lang="zh-TW" altLang="en-US" sz="1600" dirty="0">
-                <a:latin typeface="標楷體" panose="03000509000000000000" pitchFamily="65" charset="-120"/>
-                <a:ea typeface="標楷體" panose="03000509000000000000" pitchFamily="65" charset="-120"/>
-              </a:rPr>
-              <a:t>相比其他</a:t>
-            </a:r>
-            <a:r>
-              <a:rPr lang="en-US" altLang="zh-TW" sz="1600" dirty="0">
-                <a:latin typeface="標楷體" panose="03000509000000000000" pitchFamily="65" charset="-120"/>
-                <a:ea typeface="標楷體" panose="03000509000000000000" pitchFamily="65" charset="-120"/>
-              </a:rPr>
-              <a:t>Head</a:t>
-            </a:r>
-            <a:r>
-              <a:rPr lang="zh-TW" altLang="en-US" sz="1600" dirty="0">
-                <a:latin typeface="標楷體" panose="03000509000000000000" pitchFamily="65" charset="-120"/>
-                <a:ea typeface="標楷體" panose="03000509000000000000" pitchFamily="65" charset="-120"/>
-              </a:rPr>
-              <a:t>在</a:t>
-            </a:r>
-            <a:r>
-              <a:rPr lang="en-US" altLang="zh-TW" sz="1600" dirty="0">
-                <a:latin typeface="標楷體" panose="03000509000000000000" pitchFamily="65" charset="-120"/>
-                <a:ea typeface="標楷體" panose="03000509000000000000" pitchFamily="65" charset="-120"/>
-              </a:rPr>
-              <a:t>unseen</a:t>
-            </a:r>
-            <a:r>
-              <a:rPr lang="zh-TW" altLang="en-US" sz="1600" dirty="0">
-                <a:latin typeface="標楷體" panose="03000509000000000000" pitchFamily="65" charset="-120"/>
-                <a:ea typeface="標楷體" panose="03000509000000000000" pitchFamily="65" charset="-120"/>
-              </a:rPr>
-              <a:t>的文本上提升不明顯</a:t>
-            </a:r>
-            <a:endParaRPr lang="en-US" altLang="zh-TW" sz="1600" dirty="0">
+            <a:r>
+              <a:rPr lang="en-US" altLang="zh-TW" sz="1400" dirty="0">
+                <a:latin typeface="標楷體" panose="03000509000000000000" pitchFamily="65" charset="-120"/>
+                <a:ea typeface="標楷體" panose="03000509000000000000" pitchFamily="65" charset="-120"/>
+              </a:rPr>
+              <a:t>Head 1 </a:t>
+            </a:r>
+            <a:r>
+              <a:rPr lang="zh-TW" altLang="en-US" sz="1400" dirty="0">
+                <a:latin typeface="標楷體" panose="03000509000000000000" pitchFamily="65" charset="-120"/>
+                <a:ea typeface="標楷體" panose="03000509000000000000" pitchFamily="65" charset="-120"/>
+              </a:rPr>
+              <a:t>的改善程度與資料集特性高度相關，其中 </a:t>
+            </a:r>
+            <a:r>
+              <a:rPr lang="en-US" altLang="zh-TW" sz="1400" dirty="0">
+                <a:latin typeface="標楷體" panose="03000509000000000000" pitchFamily="65" charset="-120"/>
+                <a:ea typeface="標楷體" panose="03000509000000000000" pitchFamily="65" charset="-120"/>
+              </a:rPr>
+              <a:t>PTB</a:t>
+            </a:r>
+            <a:r>
+              <a:rPr lang="zh-TW" altLang="en-US" sz="1400" dirty="0">
+                <a:latin typeface="標楷體" panose="03000509000000000000" pitchFamily="65" charset="-120"/>
+                <a:ea typeface="標楷體" panose="03000509000000000000" pitchFamily="65" charset="-120"/>
+              </a:rPr>
+              <a:t>、</a:t>
+            </a:r>
+            <a:r>
+              <a:rPr lang="en-US" altLang="zh-TW" sz="1400" dirty="0">
+                <a:latin typeface="標楷體" panose="03000509000000000000" pitchFamily="65" charset="-120"/>
+                <a:ea typeface="標楷體" panose="03000509000000000000" pitchFamily="65" charset="-120"/>
+              </a:rPr>
+              <a:t>LAMBADA </a:t>
+            </a:r>
+            <a:r>
+              <a:rPr lang="zh-TW" altLang="en-US" sz="1400" dirty="0">
+                <a:latin typeface="標楷體" panose="03000509000000000000" pitchFamily="65" charset="-120"/>
+                <a:ea typeface="標楷體" panose="03000509000000000000" pitchFamily="65" charset="-120"/>
+              </a:rPr>
+              <a:t>與 </a:t>
+            </a:r>
+            <a:r>
+              <a:rPr lang="en-US" altLang="zh-TW" sz="1400" dirty="0">
+                <a:latin typeface="標楷體" panose="03000509000000000000" pitchFamily="65" charset="-120"/>
+                <a:ea typeface="標楷體" panose="03000509000000000000" pitchFamily="65" charset="-120"/>
+              </a:rPr>
+              <a:t>PubMed </a:t>
+            </a:r>
+            <a:r>
+              <a:rPr lang="zh-TW" altLang="en-US" sz="1400" dirty="0">
+                <a:latin typeface="標楷體" panose="03000509000000000000" pitchFamily="65" charset="-120"/>
+                <a:ea typeface="標楷體" panose="03000509000000000000" pitchFamily="65" charset="-120"/>
+              </a:rPr>
+              <a:t>的提升較明顯。</a:t>
+            </a:r>
+            <a:br>
+              <a:rPr lang="zh-TW" altLang="en-US" sz="1400" dirty="0">
+                <a:latin typeface="標楷體" panose="03000509000000000000" pitchFamily="65" charset="-120"/>
+                <a:ea typeface="標楷體" panose="03000509000000000000" pitchFamily="65" charset="-120"/>
+              </a:rPr>
+            </a:br>
+            <a:r>
+              <a:rPr lang="en-US" altLang="zh-TW" sz="1400" dirty="0" err="1">
+                <a:latin typeface="標楷體" panose="03000509000000000000" pitchFamily="65" charset="-120"/>
+                <a:ea typeface="標楷體" panose="03000509000000000000" pitchFamily="65" charset="-120"/>
+              </a:rPr>
+              <a:t>WikiText</a:t>
+            </a:r>
+            <a:r>
+              <a:rPr lang="en-US" altLang="zh-TW" sz="1400" dirty="0">
+                <a:latin typeface="標楷體" panose="03000509000000000000" pitchFamily="65" charset="-120"/>
+                <a:ea typeface="標楷體" panose="03000509000000000000" pitchFamily="65" charset="-120"/>
+              </a:rPr>
+              <a:t> </a:t>
+            </a:r>
+            <a:r>
+              <a:rPr lang="zh-TW" altLang="en-US" sz="1400" dirty="0">
+                <a:latin typeface="標楷體" panose="03000509000000000000" pitchFamily="65" charset="-120"/>
+                <a:ea typeface="標楷體" panose="03000509000000000000" pitchFamily="65" charset="-120"/>
+              </a:rPr>
+              <a:t>與 </a:t>
+            </a:r>
+            <a:r>
+              <a:rPr lang="en-US" altLang="zh-TW" sz="1400" dirty="0" err="1">
+                <a:latin typeface="標楷體" panose="03000509000000000000" pitchFamily="65" charset="-120"/>
+                <a:ea typeface="標楷體" panose="03000509000000000000" pitchFamily="65" charset="-120"/>
+              </a:rPr>
+              <a:t>OpenWebText</a:t>
+            </a:r>
+            <a:r>
+              <a:rPr lang="en-US" altLang="zh-TW" sz="1400" dirty="0">
+                <a:latin typeface="標楷體" panose="03000509000000000000" pitchFamily="65" charset="-120"/>
+                <a:ea typeface="標楷體" panose="03000509000000000000" pitchFamily="65" charset="-120"/>
+              </a:rPr>
+              <a:t> </a:t>
+            </a:r>
+            <a:r>
+              <a:rPr lang="zh-TW" altLang="en-US" sz="1400" dirty="0">
+                <a:latin typeface="標楷體" panose="03000509000000000000" pitchFamily="65" charset="-120"/>
+                <a:ea typeface="標楷體" panose="03000509000000000000" pitchFamily="65" charset="-120"/>
+              </a:rPr>
+              <a:t>均屬於一般領域英文文本，可能因此呈現相似的表現趨勢；</a:t>
+            </a:r>
+            <a:r>
+              <a:rPr lang="en-US" altLang="zh-TW" sz="1400" dirty="0">
+                <a:latin typeface="標楷體" panose="03000509000000000000" pitchFamily="65" charset="-120"/>
+                <a:ea typeface="標楷體" panose="03000509000000000000" pitchFamily="65" charset="-120"/>
+              </a:rPr>
+              <a:t>Head 1 </a:t>
+            </a:r>
+            <a:r>
+              <a:rPr lang="zh-TW" altLang="en-US" sz="1400" dirty="0">
+                <a:latin typeface="標楷體" panose="03000509000000000000" pitchFamily="65" charset="-120"/>
+                <a:ea typeface="標楷體" panose="03000509000000000000" pitchFamily="65" charset="-120"/>
+              </a:rPr>
+              <a:t>改善有限，提升主要集中於 </a:t>
+            </a:r>
+            <a:r>
+              <a:rPr lang="en-US" altLang="zh-TW" sz="1400" dirty="0">
+                <a:latin typeface="標楷體" panose="03000509000000000000" pitchFamily="65" charset="-120"/>
+                <a:ea typeface="標楷體" panose="03000509000000000000" pitchFamily="65" charset="-120"/>
+              </a:rPr>
+              <a:t>Head 2</a:t>
+            </a:r>
+            <a:r>
+              <a:rPr lang="zh-TW" altLang="en-US" sz="1400" dirty="0">
+                <a:latin typeface="標楷體" panose="03000509000000000000" pitchFamily="65" charset="-120"/>
+                <a:ea typeface="標楷體" panose="03000509000000000000" pitchFamily="65" charset="-120"/>
+              </a:rPr>
+              <a:t>～</a:t>
+            </a:r>
+            <a:r>
+              <a:rPr lang="en-US" altLang="zh-TW" sz="1400" dirty="0">
+                <a:latin typeface="標楷體" panose="03000509000000000000" pitchFamily="65" charset="-120"/>
+                <a:ea typeface="標楷體" panose="03000509000000000000" pitchFamily="65" charset="-120"/>
+              </a:rPr>
+              <a:t>4</a:t>
+            </a:r>
+            <a:r>
+              <a:rPr lang="zh-TW" altLang="en-US" sz="1400" dirty="0">
+                <a:latin typeface="標楷體" panose="03000509000000000000" pitchFamily="65" charset="-120"/>
+                <a:ea typeface="標楷體" panose="03000509000000000000" pitchFamily="65" charset="-120"/>
+              </a:rPr>
+              <a:t>。</a:t>
+            </a:r>
+            <a:br>
+              <a:rPr lang="en-US" altLang="zh-TW" sz="1400" dirty="0">
+                <a:latin typeface="標楷體" panose="03000509000000000000" pitchFamily="65" charset="-120"/>
+                <a:ea typeface="標楷體" panose="03000509000000000000" pitchFamily="65" charset="-120"/>
+              </a:rPr>
+            </a:br>
+            <a:r>
+              <a:rPr lang="zh-TW" altLang="en-US" sz="1400" dirty="0">
+                <a:latin typeface="標楷體" panose="03000509000000000000" pitchFamily="65" charset="-120"/>
+                <a:ea typeface="標楷體" panose="03000509000000000000" pitchFamily="65" charset="-120"/>
+              </a:rPr>
+              <a:t>雖然 </a:t>
+            </a:r>
+            <a:r>
+              <a:rPr lang="en-US" altLang="zh-TW" sz="1400" dirty="0">
+                <a:latin typeface="標楷體" panose="03000509000000000000" pitchFamily="65" charset="-120"/>
+                <a:ea typeface="標楷體" panose="03000509000000000000" pitchFamily="65" charset="-120"/>
+              </a:rPr>
+              <a:t>SDC </a:t>
+            </a:r>
+            <a:r>
+              <a:rPr lang="zh-TW" altLang="en-US" sz="1400" dirty="0">
+                <a:latin typeface="標楷體" panose="03000509000000000000" pitchFamily="65" charset="-120"/>
+                <a:ea typeface="標楷體" panose="03000509000000000000" pitchFamily="65" charset="-120"/>
+              </a:rPr>
+              <a:t>與 </a:t>
+            </a:r>
+            <a:r>
+              <a:rPr lang="en-US" altLang="zh-TW" sz="1400" dirty="0">
+                <a:latin typeface="標楷體" panose="03000509000000000000" pitchFamily="65" charset="-120"/>
+                <a:ea typeface="標楷體" panose="03000509000000000000" pitchFamily="65" charset="-120"/>
+              </a:rPr>
+              <a:t>LCM </a:t>
+            </a:r>
+            <a:r>
+              <a:rPr lang="zh-TW" altLang="en-US" sz="1400" dirty="0">
+                <a:latin typeface="標楷體" panose="03000509000000000000" pitchFamily="65" charset="-120"/>
+                <a:ea typeface="標楷體" panose="03000509000000000000" pitchFamily="65" charset="-120"/>
+              </a:rPr>
+              <a:t>直接約束 </a:t>
+            </a:r>
+            <a:r>
+              <a:rPr lang="en-US" altLang="zh-TW" sz="1400" dirty="0">
+                <a:latin typeface="標楷體" panose="03000509000000000000" pitchFamily="65" charset="-120"/>
+                <a:ea typeface="標楷體" panose="03000509000000000000" pitchFamily="65" charset="-120"/>
+              </a:rPr>
+              <a:t>Head 2</a:t>
+            </a:r>
+            <a:r>
+              <a:rPr lang="zh-TW" altLang="en-US" sz="1400" dirty="0">
+                <a:latin typeface="標楷體" panose="03000509000000000000" pitchFamily="65" charset="-120"/>
+                <a:ea typeface="標楷體" panose="03000509000000000000" pitchFamily="65" charset="-120"/>
+              </a:rPr>
+              <a:t>～</a:t>
+            </a:r>
+            <a:r>
+              <a:rPr lang="en-US" altLang="zh-TW" sz="1400" dirty="0">
+                <a:latin typeface="標楷體" panose="03000509000000000000" pitchFamily="65" charset="-120"/>
+                <a:ea typeface="標楷體" panose="03000509000000000000" pitchFamily="65" charset="-120"/>
+              </a:rPr>
+              <a:t>4</a:t>
+            </a:r>
+            <a:r>
+              <a:rPr lang="zh-TW" altLang="en-US" sz="1400" dirty="0">
+                <a:latin typeface="標楷體" panose="03000509000000000000" pitchFamily="65" charset="-120"/>
+                <a:ea typeface="標楷體" panose="03000509000000000000" pitchFamily="65" charset="-120"/>
+              </a:rPr>
+              <a:t>，但 </a:t>
+            </a:r>
+            <a:r>
+              <a:rPr lang="en-US" altLang="zh-TW" sz="1400" dirty="0">
+                <a:latin typeface="標楷體" panose="03000509000000000000" pitchFamily="65" charset="-120"/>
+                <a:ea typeface="標楷體" panose="03000509000000000000" pitchFamily="65" charset="-120"/>
+              </a:rPr>
+              <a:t>Head 4 </a:t>
+            </a:r>
+            <a:r>
+              <a:rPr lang="zh-TW" altLang="en-US" sz="1400" dirty="0">
+                <a:latin typeface="標楷體" panose="03000509000000000000" pitchFamily="65" charset="-120"/>
+                <a:ea typeface="標楷體" panose="03000509000000000000" pitchFamily="65" charset="-120"/>
+              </a:rPr>
+              <a:t>在不同 </a:t>
+            </a:r>
+            <a:r>
+              <a:rPr lang="en-US" altLang="zh-TW" sz="1400" dirty="0">
+                <a:latin typeface="標楷體" panose="03000509000000000000" pitchFamily="65" charset="-120"/>
+                <a:ea typeface="標楷體" panose="03000509000000000000" pitchFamily="65" charset="-120"/>
+              </a:rPr>
+              <a:t>unseen datasets </a:t>
+            </a:r>
+            <a:r>
+              <a:rPr lang="zh-TW" altLang="en-US" sz="1400" dirty="0">
+                <a:latin typeface="標楷體" panose="03000509000000000000" pitchFamily="65" charset="-120"/>
+                <a:ea typeface="標楷體" panose="03000509000000000000" pitchFamily="65" charset="-120"/>
+              </a:rPr>
+              <a:t>上的改善幅度並不一致，尤其在 </a:t>
+            </a:r>
+            <a:r>
+              <a:rPr lang="en-US" altLang="zh-TW" sz="1400" dirty="0" err="1">
+                <a:latin typeface="標楷體" panose="03000509000000000000" pitchFamily="65" charset="-120"/>
+                <a:ea typeface="標楷體" panose="03000509000000000000" pitchFamily="65" charset="-120"/>
+              </a:rPr>
+              <a:t>arXiv</a:t>
+            </a:r>
+            <a:r>
+              <a:rPr lang="en-US" altLang="zh-TW" sz="1400" dirty="0">
+                <a:latin typeface="標楷體" panose="03000509000000000000" pitchFamily="65" charset="-120"/>
+                <a:ea typeface="標楷體" panose="03000509000000000000" pitchFamily="65" charset="-120"/>
+              </a:rPr>
+              <a:t> </a:t>
+            </a:r>
+            <a:r>
+              <a:rPr lang="zh-TW" altLang="en-US" sz="1400" dirty="0">
+                <a:latin typeface="標楷體" panose="03000509000000000000" pitchFamily="65" charset="-120"/>
+                <a:ea typeface="標楷體" panose="03000509000000000000" pitchFamily="65" charset="-120"/>
+              </a:rPr>
+              <a:t>上僅提升 </a:t>
+            </a:r>
+            <a:r>
+              <a:rPr lang="en-US" altLang="zh-TW" sz="1400" dirty="0">
+                <a:latin typeface="標楷體" panose="03000509000000000000" pitchFamily="65" charset="-120"/>
+                <a:ea typeface="標楷體" panose="03000509000000000000" pitchFamily="65" charset="-120"/>
+              </a:rPr>
+              <a:t>0.27%</a:t>
+            </a:r>
+            <a:r>
+              <a:rPr lang="zh-TW" altLang="en-US" sz="1400" dirty="0">
+                <a:latin typeface="標楷體" panose="03000509000000000000" pitchFamily="65" charset="-120"/>
+                <a:ea typeface="標楷體" panose="03000509000000000000" pitchFamily="65" charset="-120"/>
+              </a:rPr>
+              <a:t>。</a:t>
+            </a:r>
+            <a:endParaRPr lang="en-US" altLang="zh-TW" sz="1400" dirty="0">
               <a:latin typeface="標楷體" panose="03000509000000000000" pitchFamily="65" charset="-120"/>
               <a:ea typeface="標楷體" panose="03000509000000000000" pitchFamily="65" charset="-120"/>
             </a:endParaRPr>
